--- a/docs/competition/preliminary-2026/个人参赛版/AI+民生-个人参赛-OneCase-v2.pptx
+++ b/docs/competition/preliminary-2026/个人参赛版/AI+民生-个人参赛-OneCase-v2.pptx
@@ -688,32 +688,7 @@
           <a:lstStyle xmlns:a="http://schemas.openxmlformats.org/drawingml/2006/main"/>
           <a:p xmlns:a="http://schemas.openxmlformats.org/drawingml/2006/main">
             <a:r>
-              <a:t>现在可以演示文字整理、草稿编辑、人工确认和事项跟踪，也能上传图片、查看预览、保存后刷新恢复。图片已经接到模型接口，但当前运行的是 Mock，不能识别图片，真实识别还需配置视觉模型并实测。语音入口已禁用，微信接入和语义检索也没做。真实试点前仍要补认证权限、组织数据隔离、访问频率限制和待确认草稿列表；现阶段只用合成数据演示。</a:t>
-            </a:r>
-          </a:p>
-          <a:p xmlns:a="http://schemas.openxmlformats.org/drawingml/2006/main">
-            <a:r>
-              <a:t/>
-            </a:r>
-          </a:p>
-          <a:p xmlns:a="http://schemas.openxmlformats.org/drawingml/2006/main">
-            <a:r>
-              <a:t>[Sources]</a:t>
-            </a:r>
-          </a:p>
-          <a:p xmlns:a="http://schemas.openxmlformats.org/drawingml/2006/main">
-            <a:r>
-              <a:t>- docs/testing/image-intake.md (2026-08-31 scoped verification; 52 AI + 24 Web unit tests, local API and browser checks; no real vision model test)</a:t>
-            </a:r>
-          </a:p>
-          <a:p xmlns:a="http://schemas.openxmlformats.org/drawingml/2006/main">
-            <a:r>
-              <a:t>- docs/competition/preliminary-2026/01-报名信息与提交清单.md</a:t>
-            </a:r>
-          </a:p>
-          <a:p xmlns:a="http://schemas.openxmlformats.org/drawingml/2006/main">
-            <a:r>
-              <a:t>[/Sources]</a:t>
+              <a:t>现在可以演示文字整理、草稿编辑、人工确认和事项跟踪，也能上传图片、查看预览、保存后刷新恢复。Qwen、OpenAI、StepFun 的图片消息链路已经接入；当前一条 StepFun 合成图片 Intake 已真实到达 Review，但代表性真实场景仍待验证。现场如果使用 Mock，要明确它不能识别图片，只展示上传、保存、失败恢复和转人工。语音入口已禁用，微信接入和语义检索也没做。真实试点前仍要补认证权限、组织数据隔离、访问频率限制和待确认草稿列表；现阶段只用合成数据演示。</a:t>
             </a:r>
           </a:p>
         </p:txBody>
@@ -1343,32 +1318,7 @@
           <a:lstStyle xmlns:a="http://schemas.openxmlformats.org/drawingml/2006/main"/>
           <a:p xmlns:a="http://schemas.openxmlformats.org/drawingml/2006/main">
             <a:r>
-              <a:t>模型负责把反馈整理成结构化草稿，程序检查字段格式、相似候选、人工确认和状态变更。页面通过 API 读写数据库，原始反馈和处理记录都会保存。项目已有 Qwen、OpenAI 文字与图片接口，Mock 只用于文字流程测试；接口写好不代表真实模型效果已经测好。当前查重用的是词汇、地点、类别和时间，没有使用 Embedding。</a:t>
-            </a:r>
-          </a:p>
-          <a:p xmlns:a="http://schemas.openxmlformats.org/drawingml/2006/main">
-            <a:r>
-              <a:t/>
-            </a:r>
-          </a:p>
-          <a:p xmlns:a="http://schemas.openxmlformats.org/drawingml/2006/main">
-            <a:r>
-              <a:t>[Sources]</a:t>
-            </a:r>
-          </a:p>
-          <a:p xmlns:a="http://schemas.openxmlformats.org/drawingml/2006/main">
-            <a:r>
-              <a:t>- docs/testing/image-intake.md (2026-08-31 scoped verification; 52 AI + 24 Web unit tests, local API and browser checks; no real vision model test)</a:t>
-            </a:r>
-          </a:p>
-          <a:p xmlns:a="http://schemas.openxmlformats.org/drawingml/2006/main">
-            <a:r>
-              <a:t>- docs/competition/preliminary-2026/01-报名信息与提交清单.md</a:t>
-            </a:r>
-          </a:p>
-          <a:p xmlns:a="http://schemas.openxmlformats.org/drawingml/2006/main">
-            <a:r>
-              <a:t>[/Sources]</a:t>
+              <a:t>模型负责把反馈整理成结构化草稿，程序检查字段格式、相似候选、人工确认和状态变更。页面通过 API 读写数据库，原始反馈和处理记录都会保存。项目已有 Qwen、OpenAI、StepFun 的文字与图片消息适配；当前一条单张合成图片 Intake 已经 StepFun 分析并到达 Review，Qwen、OpenAI 的图片检查以及 StepFun 单元测试使用模拟响应。一次正常调用不能说明准确率或稳定性。Mock 只用于文字流程测试。当前查重用的是词汇、地点、类别和时间，没有使用 Embedding。</a:t>
             </a:r>
           </a:p>
         </p:txBody>
@@ -1438,32 +1388,7 @@
           <a:lstStyle xmlns:a="http://schemas.openxmlformats.org/drawingml/2006/main"/>
           <a:p xmlns:a="http://schemas.openxmlformats.org/drawingml/2006/main">
             <a:r>
-              <a:t>图片输入修复后，我重新跑了 AI 包的 52 项和 Web 包的 24 项单元测试，也在本地接口和浏览器里检查了图片上传、刷新恢复、重复提交和失败转人工。类型检查和 AI 包编译也通过了。这 76 项是本轮检查的范围，不是全仓测试总数。真实视觉模型还没有实测，目前只能说明上传和处理流程通过了这些检查，不能说明图片能识别多准，更不能代替社区使用效果。</a:t>
-            </a:r>
-          </a:p>
-          <a:p xmlns:a="http://schemas.openxmlformats.org/drawingml/2006/main">
-            <a:r>
-              <a:t/>
-            </a:r>
-          </a:p>
-          <a:p xmlns:a="http://schemas.openxmlformats.org/drawingml/2006/main">
-            <a:r>
-              <a:t>[Sources]</a:t>
-            </a:r>
-          </a:p>
-          <a:p xmlns:a="http://schemas.openxmlformats.org/drawingml/2006/main">
-            <a:r>
-              <a:t>- docs/testing/image-intake.md (2026-08-31 scoped verification; 52 AI + 24 Web unit tests, local API and browser checks; no real vision model test)</a:t>
-            </a:r>
-          </a:p>
-          <a:p xmlns:a="http://schemas.openxmlformats.org/drawingml/2006/main">
-            <a:r>
-              <a:t>- docs/competition/preliminary-2026/01-报名信息与提交清单.md</a:t>
-            </a:r>
-          </a:p>
-          <a:p xmlns:a="http://schemas.openxmlformats.org/drawingml/2006/main">
-            <a:r>
-              <a:t>[/Sources]</a:t>
+              <a:t>这次我重新跑了全仓 200 项单元测试——AI 包 74 项、Web 包 68 项、Contracts 包 25 项、domain 包 33 项——全部通过；另有 99 项业务不变量和 29 项端到端测试（E2E 已隔离专用库与端口）同口径通过。单元测试里的模型响应是模拟的，只能证明 Provider 装配、请求格式、输出校验和失败处理。当前一条带单张合成图片的 Intake 已由 StepFun 完成分析并到达 Review，数据库记录耗时 3449ms、生成 1 条 Issue；这仍不能说明图片识别准确率、稳定性，更不能代替代表性样本或社区使用效果。</a:t>
             </a:r>
           </a:p>
         </p:txBody>
@@ -9948,6 +9873,10 @@
             <a:noFill/>
           </a:ln>
         </p:spPr>
+        <p:txBody xmlns:a="http://schemas.openxmlformats.org/drawingml/2006/main">
+          <a:bodyPr/>
+          <a:p/>
+        </p:txBody>
       </p:sp>
       <p:sp>
         <p:nvSpPr>
@@ -10110,6 +10039,10 @@
             </a:solidFill>
           </a:ln>
         </p:spPr>
+        <p:txBody xmlns:a="http://schemas.openxmlformats.org/drawingml/2006/main">
+          <a:bodyPr/>
+          <a:p/>
+        </p:txBody>
       </p:sp>
       <p:sp>
         <p:nvSpPr>
@@ -10150,6 +10083,10 @@
             </a:solidFill>
           </a:ln>
         </p:spPr>
+        <p:txBody xmlns:a="http://schemas.openxmlformats.org/drawingml/2006/main">
+          <a:bodyPr/>
+          <a:p/>
+        </p:txBody>
       </p:sp>
       <p:sp>
         <p:nvSpPr>
@@ -10193,6 +10130,10 @@
             </a:solidFill>
           </a:ln>
         </p:spPr>
+        <p:txBody xmlns:a="http://schemas.openxmlformats.org/drawingml/2006/main">
+          <a:bodyPr/>
+          <a:p/>
+        </p:txBody>
       </p:sp>
       <p:sp>
         <p:nvSpPr>
@@ -10273,6 +10214,10 @@
             <a:noFill/>
           </a:ln>
         </p:spPr>
+        <p:txBody xmlns:a="http://schemas.openxmlformats.org/drawingml/2006/main">
+          <a:bodyPr/>
+          <a:p/>
+        </p:txBody>
       </p:sp>
       <p:sp>
         <p:nvSpPr>
@@ -10353,6 +10298,10 @@
             <a:noFill/>
           </a:ln>
         </p:spPr>
+        <p:txBody xmlns:a="http://schemas.openxmlformats.org/drawingml/2006/main">
+          <a:bodyPr/>
+          <a:p/>
+        </p:txBody>
       </p:sp>
       <p:sp>
         <p:nvSpPr>
@@ -10433,6 +10382,10 @@
             <a:noFill/>
           </a:ln>
         </p:spPr>
+        <p:txBody xmlns:a="http://schemas.openxmlformats.org/drawingml/2006/main">
+          <a:bodyPr/>
+          <a:p/>
+        </p:txBody>
       </p:sp>
       <p:sp>
         <p:nvSpPr>
@@ -10513,6 +10466,10 @@
             <a:noFill/>
           </a:ln>
         </p:spPr>
+        <p:txBody xmlns:a="http://schemas.openxmlformats.org/drawingml/2006/main">
+          <a:bodyPr/>
+          <a:p/>
+        </p:txBody>
       </p:sp>
       <p:sp>
         <p:nvSpPr>
@@ -10603,6 +10560,10 @@
             </a:solidFill>
           </a:ln>
         </p:spPr>
+        <p:txBody xmlns:a="http://schemas.openxmlformats.org/drawingml/2006/main">
+          <a:bodyPr/>
+          <a:p/>
+        </p:txBody>
       </p:sp>
       <p:sp>
         <p:nvSpPr>
@@ -10633,6 +10594,10 @@
             </a:solidFill>
           </a:ln>
         </p:spPr>
+        <p:txBody xmlns:a="http://schemas.openxmlformats.org/drawingml/2006/main">
+          <a:bodyPr/>
+          <a:p/>
+        </p:txBody>
       </p:sp>
       <p:sp>
         <p:nvSpPr>
@@ -10713,6 +10678,10 @@
             </a:solidFill>
           </a:ln>
         </p:spPr>
+        <p:txBody xmlns:a="http://schemas.openxmlformats.org/drawingml/2006/main">
+          <a:bodyPr/>
+          <a:p/>
+        </p:txBody>
       </p:sp>
       <p:sp>
         <p:nvSpPr>
@@ -10793,6 +10762,10 @@
             </a:solidFill>
           </a:ln>
         </p:spPr>
+        <p:txBody xmlns:a="http://schemas.openxmlformats.org/drawingml/2006/main">
+          <a:bodyPr/>
+          <a:p/>
+        </p:txBody>
       </p:sp>
       <p:sp>
         <p:nvSpPr>
@@ -10873,6 +10846,10 @@
             </a:solidFill>
           </a:ln>
         </p:spPr>
+        <p:txBody xmlns:a="http://schemas.openxmlformats.org/drawingml/2006/main">
+          <a:bodyPr/>
+          <a:p/>
+        </p:txBody>
       </p:sp>
       <p:sp>
         <p:nvSpPr>
@@ -10953,6 +10930,10 @@
             </a:solidFill>
           </a:ln>
         </p:spPr>
+        <p:txBody xmlns:a="http://schemas.openxmlformats.org/drawingml/2006/main">
+          <a:bodyPr/>
+          <a:p/>
+        </p:txBody>
       </p:sp>
       <p:sp>
         <p:nvSpPr>
@@ -11043,6 +11024,10 @@
             </a:solidFill>
           </a:ln>
         </p:spPr>
+        <p:txBody xmlns:a="http://schemas.openxmlformats.org/drawingml/2006/main">
+          <a:bodyPr/>
+          <a:p/>
+        </p:txBody>
       </p:sp>
       <p:sp>
         <p:nvSpPr>
@@ -11090,6 +11075,10 @@
             </a:solidFill>
           </a:ln>
         </p:spPr>
+        <p:txBody xmlns:a="http://schemas.openxmlformats.org/drawingml/2006/main">
+          <a:bodyPr/>
+          <a:p/>
+        </p:txBody>
       </p:sp>
       <p:sp>
         <p:nvSpPr>
@@ -11187,6 +11176,10 @@
             </a:solidFill>
           </a:ln>
         </p:spPr>
+        <p:txBody xmlns:a="http://schemas.openxmlformats.org/drawingml/2006/main">
+          <a:bodyPr/>
+          <a:p/>
+        </p:txBody>
       </p:sp>
       <p:sp>
         <p:nvSpPr>
@@ -11284,6 +11277,10 @@
             </a:solidFill>
           </a:ln>
         </p:spPr>
+        <p:txBody xmlns:a="http://schemas.openxmlformats.org/drawingml/2006/main">
+          <a:bodyPr/>
+          <a:p/>
+        </p:txBody>
       </p:sp>
       <p:sp>
         <p:nvSpPr>
@@ -11381,6 +11378,10 @@
             </a:solidFill>
           </a:ln>
         </p:spPr>
+        <p:txBody xmlns:a="http://schemas.openxmlformats.org/drawingml/2006/main">
+          <a:bodyPr/>
+          <a:p/>
+        </p:txBody>
       </p:sp>
       <p:sp>
         <p:nvSpPr>
@@ -11493,6 +11494,10 @@
             </a:solidFill>
           </a:ln>
         </p:spPr>
+        <p:txBody xmlns:a="http://schemas.openxmlformats.org/drawingml/2006/main">
+          <a:bodyPr/>
+          <a:p/>
+        </p:txBody>
       </p:sp>
       <p:sp>
         <p:nvSpPr>
@@ -11533,6 +11538,10 @@
             </a:solidFill>
           </a:ln>
         </p:spPr>
+        <p:txBody xmlns:a="http://schemas.openxmlformats.org/drawingml/2006/main">
+          <a:bodyPr/>
+          <a:p/>
+        </p:txBody>
       </p:sp>
       <p:sp>
         <p:nvSpPr>
@@ -11573,6 +11582,10 @@
             </a:solidFill>
           </a:ln>
         </p:spPr>
+        <p:txBody xmlns:a="http://schemas.openxmlformats.org/drawingml/2006/main">
+          <a:bodyPr/>
+          <a:p/>
+        </p:txBody>
       </p:sp>
       <p:sp>
         <p:nvSpPr>
@@ -11591,7 +11604,7 @@
         <p:spPr>
           <a:xfrm xmlns:a="http://schemas.openxmlformats.org/drawingml/2006/main" rot="0" flipH="0" flipV="0">
             <a:off x="599694" y="5218748"/>
-            <a:ext cx="4180332" cy="381381"/>
+            <a:ext cx="5120640" cy="381381"/>
           </a:xfrm>
           <a:prstGeom xmlns:a="http://schemas.openxmlformats.org/drawingml/2006/main" prst="rect">
             <a:avLst/>
@@ -11619,7 +11632,7 @@
                 <a:ea typeface="SimSun"/>
                 <a:cs typeface="SimSun"/>
               </a:rPr>
-              <a:t>图片可上传，真实识别仍待验证。</a:t>
+              <a:t>图片可上传；一条 StepFun 合成图片已到达 Review。</a:t>
             </a:r>
           </a:p>
         </p:txBody>
@@ -11669,7 +11682,7 @@
                 <a:ea typeface="Microsoft YaHei"/>
                 <a:cs typeface="Microsoft YaHei"/>
               </a:rPr>
-              <a:t>图片支持预览、保存和恢复；当前</a:t>
+              <a:t>图片支持预览、保存和恢复；Mock 不能识别图片，语音暂未支持。只使用合成数据演示。</a:t>
             </a:r>
             <a:r>
               <a:rPr sz="1350">
@@ -11680,7 +11693,7 @@
                 <a:ea typeface="Arial"/>
                 <a:cs typeface="Arial"/>
               </a:rPr>
-              <a:t> Mock </a:t>
+              <a:t/>
             </a:r>
             <a:r>
               <a:rPr sz="1350">
@@ -11691,7 +11704,7 @@
                 <a:ea typeface="Microsoft YaHei"/>
                 <a:cs typeface="Microsoft YaHei"/>
               </a:rPr>
-              <a:t>不能识别图片，语音暂未支持。只使用合成数据演示。</a:t>
+              <a:t/>
             </a:r>
           </a:p>
         </p:txBody>
@@ -15835,6 +15848,10 @@
             <a:noFill/>
           </a:ln>
         </p:spPr>
+        <p:txBody xmlns:a="http://schemas.openxmlformats.org/drawingml/2006/main">
+          <a:bodyPr/>
+          <a:p/>
+        </p:txBody>
       </p:sp>
       <p:sp>
         <p:nvSpPr>
@@ -15997,6 +16014,10 @@
             </a:solidFill>
           </a:ln>
         </p:spPr>
+        <p:txBody xmlns:a="http://schemas.openxmlformats.org/drawingml/2006/main">
+          <a:bodyPr/>
+          <a:p/>
+        </p:txBody>
       </p:sp>
       <p:sp>
         <p:nvSpPr>
@@ -16027,6 +16048,10 @@
             <a:noFill/>
           </a:ln>
         </p:spPr>
+        <p:txBody xmlns:a="http://schemas.openxmlformats.org/drawingml/2006/main">
+          <a:bodyPr/>
+          <a:p/>
+        </p:txBody>
       </p:sp>
       <p:sp>
         <p:nvSpPr>
@@ -16084,6 +16109,10 @@
             </a:solidFill>
           </a:ln>
         </p:spPr>
+        <p:txBody xmlns:a="http://schemas.openxmlformats.org/drawingml/2006/main">
+          <a:bodyPr/>
+          <a:p/>
+        </p:txBody>
       </p:sp>
       <p:sp>
         <p:nvSpPr>
@@ -16140,6 +16169,10 @@
             </a:solidFill>
           </a:ln>
         </p:spPr>
+        <p:txBody xmlns:a="http://schemas.openxmlformats.org/drawingml/2006/main">
+          <a:bodyPr/>
+          <a:p/>
+        </p:txBody>
       </p:sp>
       <p:sp>
         <p:nvSpPr>
@@ -16313,6 +16346,10 @@
             </a:solidFill>
           </a:ln>
         </p:spPr>
+        <p:txBody xmlns:a="http://schemas.openxmlformats.org/drawingml/2006/main">
+          <a:bodyPr/>
+          <a:p/>
+        </p:txBody>
       </p:sp>
       <p:sp>
         <p:nvSpPr>
@@ -16597,6 +16634,10 @@
             </a:solidFill>
           </a:ln>
         </p:spPr>
+        <p:txBody xmlns:a="http://schemas.openxmlformats.org/drawingml/2006/main">
+          <a:bodyPr/>
+          <a:p/>
+        </p:txBody>
       </p:sp>
       <p:sp>
         <p:nvSpPr>
@@ -16887,6 +16928,10 @@
             </a:solidFill>
           </a:ln>
         </p:spPr>
+        <p:txBody xmlns:a="http://schemas.openxmlformats.org/drawingml/2006/main">
+          <a:bodyPr/>
+          <a:p/>
+        </p:txBody>
       </p:sp>
       <p:sp>
         <p:nvSpPr>
@@ -17105,7 +17150,7 @@
                 <a:ea typeface="Microsoft YaHei"/>
                 <a:cs typeface="Microsoft YaHei"/>
               </a:rPr>
-              <a:t>适配（</a:t>
+              <a:t>适配（Mock / Qwen / OpenAI /</a:t>
             </a:r>
             <a:r>
               <a:rPr sz="1350">
@@ -17116,7 +17161,7 @@
                 <a:ea typeface="Arial"/>
                 <a:cs typeface="Arial"/>
               </a:rPr>
-              <a:t>Mock / Qwen / OpenAI</a:t>
+              <a:t/>
             </a:r>
             <a:r>
               <a:rPr sz="1350">
@@ -17127,7 +17172,7 @@
                 <a:ea typeface="Microsoft YaHei"/>
                 <a:cs typeface="Microsoft YaHei"/>
               </a:rPr>
-              <a:t>）、</a:t>
+              <a:t/>
             </a:r>
           </a:p>
         </p:txBody>
@@ -17149,7 +17194,7 @@
         <p:spPr>
           <a:xfrm xmlns:a="http://schemas.openxmlformats.org/drawingml/2006/main" rot="0" flipH="0" flipV="0">
             <a:off x="7232142" y="3816668"/>
-            <a:ext cx="1300277" cy="264033"/>
+            <a:ext cx="2468880" cy="264033"/>
           </a:xfrm>
           <a:prstGeom xmlns:a="http://schemas.openxmlformats.org/drawingml/2006/main" prst="rect">
             <a:avLst/>
@@ -17177,7 +17222,7 @@
                 <a:ea typeface="Microsoft YaHei"/>
                 <a:cs typeface="Microsoft YaHei"/>
               </a:rPr>
-              <a:t>数据层与</a:t>
+              <a:t>StepFun）、数据层与 API。</a:t>
             </a:r>
             <a:r>
               <a:rPr sz="1350">
@@ -17188,7 +17233,7 @@
                 <a:ea typeface="Arial"/>
                 <a:cs typeface="Arial"/>
               </a:rPr>
-              <a:t> API</a:t>
+              <a:t/>
             </a:r>
             <a:r>
               <a:rPr sz="1350">
@@ -17199,7 +17244,7 @@
                 <a:ea typeface="Microsoft YaHei"/>
                 <a:cs typeface="Microsoft YaHei"/>
               </a:rPr>
-              <a:t>。</a:t>
+              <a:t/>
             </a:r>
           </a:p>
         </p:txBody>
@@ -24337,6 +24382,10 @@
             <a:noFill/>
           </a:ln>
         </p:spPr>
+        <p:txBody xmlns:a="http://schemas.openxmlformats.org/drawingml/2006/main">
+          <a:bodyPr/>
+          <a:p/>
+        </p:txBody>
       </p:sp>
       <p:sp>
         <p:nvSpPr>
@@ -24499,6 +24548,10 @@
             </a:solidFill>
           </a:ln>
         </p:spPr>
+        <p:txBody xmlns:a="http://schemas.openxmlformats.org/drawingml/2006/main">
+          <a:bodyPr/>
+          <a:p/>
+        </p:txBody>
       </p:sp>
       <p:sp>
         <p:nvSpPr>
@@ -24529,6 +24582,10 @@
             <a:noFill/>
           </a:ln>
         </p:spPr>
+        <p:txBody xmlns:a="http://schemas.openxmlformats.org/drawingml/2006/main">
+          <a:bodyPr/>
+          <a:p/>
+        </p:txBody>
       </p:sp>
       <p:sp>
         <p:nvSpPr>
@@ -24672,6 +24729,10 @@
             <a:noFill/>
           </a:ln>
         </p:spPr>
+        <p:txBody xmlns:a="http://schemas.openxmlformats.org/drawingml/2006/main">
+          <a:bodyPr/>
+          <a:p/>
+        </p:txBody>
       </p:sp>
       <p:sp>
         <p:nvSpPr>
@@ -24762,6 +24823,10 @@
             </a:solidFill>
           </a:ln>
         </p:spPr>
+        <p:txBody xmlns:a="http://schemas.openxmlformats.org/drawingml/2006/main">
+          <a:bodyPr/>
+          <a:p/>
+        </p:txBody>
       </p:sp>
       <p:sp>
         <p:nvSpPr>
@@ -24852,6 +24917,10 @@
             </a:solidFill>
           </a:ln>
         </p:spPr>
+        <p:txBody xmlns:a="http://schemas.openxmlformats.org/drawingml/2006/main">
+          <a:bodyPr/>
+          <a:p/>
+        </p:txBody>
       </p:sp>
       <p:sp>
         <p:nvSpPr>
@@ -24932,6 +25001,10 @@
             <a:noFill/>
           </a:ln>
         </p:spPr>
+        <p:txBody xmlns:a="http://schemas.openxmlformats.org/drawingml/2006/main">
+          <a:bodyPr/>
+          <a:p/>
+        </p:txBody>
       </p:sp>
       <p:sp>
         <p:nvSpPr>
@@ -25001,6 +25074,10 @@
             </a:solidFill>
           </a:ln>
         </p:spPr>
+        <p:txBody xmlns:a="http://schemas.openxmlformats.org/drawingml/2006/main">
+          <a:bodyPr/>
+          <a:p/>
+        </p:txBody>
       </p:sp>
       <p:sp>
         <p:nvSpPr>
@@ -25050,6 +25127,10 @@
             </a:solidFill>
           </a:ln>
         </p:spPr>
+        <p:txBody xmlns:a="http://schemas.openxmlformats.org/drawingml/2006/main">
+          <a:bodyPr/>
+          <a:p/>
+        </p:txBody>
       </p:sp>
       <p:sp>
         <p:nvSpPr>
@@ -25090,6 +25171,10 @@
             </a:solidFill>
           </a:ln>
         </p:spPr>
+        <p:txBody xmlns:a="http://schemas.openxmlformats.org/drawingml/2006/main">
+          <a:bodyPr/>
+          <a:p/>
+        </p:txBody>
       </p:sp>
       <p:sp>
         <p:nvSpPr>
@@ -25130,6 +25215,10 @@
             </a:solidFill>
           </a:ln>
         </p:spPr>
+        <p:txBody xmlns:a="http://schemas.openxmlformats.org/drawingml/2006/main">
+          <a:bodyPr/>
+          <a:p/>
+        </p:txBody>
       </p:sp>
       <p:sp>
         <p:nvSpPr>
@@ -25170,6 +25259,10 @@
             </a:solidFill>
           </a:ln>
         </p:spPr>
+        <p:txBody xmlns:a="http://schemas.openxmlformats.org/drawingml/2006/main">
+          <a:bodyPr/>
+          <a:p/>
+        </p:txBody>
       </p:sp>
       <p:sp>
         <p:nvSpPr>
@@ -25210,6 +25303,10 @@
             </a:solidFill>
           </a:ln>
         </p:spPr>
+        <p:txBody xmlns:a="http://schemas.openxmlformats.org/drawingml/2006/main">
+          <a:bodyPr/>
+          <a:p/>
+        </p:txBody>
       </p:sp>
       <p:sp>
         <p:nvSpPr>
@@ -25250,6 +25347,10 @@
             </a:solidFill>
           </a:ln>
         </p:spPr>
+        <p:txBody xmlns:a="http://schemas.openxmlformats.org/drawingml/2006/main">
+          <a:bodyPr/>
+          <a:p/>
+        </p:txBody>
       </p:sp>
       <p:sp>
         <p:nvSpPr>
@@ -25290,6 +25391,10 @@
             </a:solidFill>
           </a:ln>
         </p:spPr>
+        <p:txBody xmlns:a="http://schemas.openxmlformats.org/drawingml/2006/main">
+          <a:bodyPr/>
+          <a:p/>
+        </p:txBody>
       </p:sp>
       <p:sp>
         <p:nvSpPr>
@@ -25330,6 +25435,10 @@
             </a:solidFill>
           </a:ln>
         </p:spPr>
+        <p:txBody xmlns:a="http://schemas.openxmlformats.org/drawingml/2006/main">
+          <a:bodyPr/>
+          <a:p/>
+        </p:txBody>
       </p:sp>
       <p:sp>
         <p:nvSpPr>
@@ -25370,6 +25479,10 @@
             </a:solidFill>
           </a:ln>
         </p:spPr>
+        <p:txBody xmlns:a="http://schemas.openxmlformats.org/drawingml/2006/main">
+          <a:bodyPr/>
+          <a:p/>
+        </p:txBody>
       </p:sp>
       <p:sp>
         <p:nvSpPr>
@@ -25463,6 +25576,10 @@
             <a:noFill/>
           </a:ln>
         </p:spPr>
+        <p:txBody xmlns:a="http://schemas.openxmlformats.org/drawingml/2006/main">
+          <a:bodyPr/>
+          <a:p/>
+        </p:txBody>
       </p:sp>
       <p:sp>
         <p:nvSpPr>
@@ -25553,6 +25670,10 @@
             </a:solidFill>
           </a:ln>
         </p:spPr>
+        <p:txBody xmlns:a="http://schemas.openxmlformats.org/drawingml/2006/main">
+          <a:bodyPr/>
+          <a:p/>
+        </p:txBody>
       </p:sp>
       <p:sp>
         <p:nvSpPr>
@@ -25599,7 +25720,7 @@
                 <a:ea typeface="Consolas"/>
                 <a:cs typeface="Consolas"/>
               </a:rPr>
-              <a:t>Qwen</a:t>
+              <a:t>Qwen / OpenAI</a:t>
             </a:r>
           </a:p>
         </p:txBody>
@@ -25643,6 +25764,10 @@
             </a:solidFill>
           </a:ln>
         </p:spPr>
+        <p:txBody xmlns:a="http://schemas.openxmlformats.org/drawingml/2006/main">
+          <a:bodyPr/>
+          <a:p/>
+        </p:txBody>
       </p:sp>
       <p:sp>
         <p:nvSpPr>
@@ -25689,7 +25814,7 @@
                 <a:ea typeface="Consolas"/>
                 <a:cs typeface="Consolas"/>
               </a:rPr>
-              <a:t>OpenAI</a:t>
+              <a:t>StepFun</a:t>
             </a:r>
           </a:p>
         </p:txBody>
@@ -25723,6 +25848,10 @@
             <a:noFill/>
           </a:ln>
         </p:spPr>
+        <p:txBody xmlns:a="http://schemas.openxmlformats.org/drawingml/2006/main">
+          <a:bodyPr/>
+          <a:p/>
+        </p:txBody>
       </p:sp>
       <p:sp>
         <p:nvSpPr>
@@ -25855,6 +25984,10 @@
             <a:noFill/>
           </a:ln>
         </p:spPr>
+        <p:txBody xmlns:a="http://schemas.openxmlformats.org/drawingml/2006/main">
+          <a:bodyPr/>
+          <a:p/>
+        </p:txBody>
       </p:sp>
       <p:sp>
         <p:nvSpPr>
@@ -25956,6 +26089,10 @@
             </a:solidFill>
           </a:ln>
         </p:spPr>
+        <p:txBody xmlns:a="http://schemas.openxmlformats.org/drawingml/2006/main">
+          <a:bodyPr/>
+          <a:p/>
+        </p:txBody>
       </p:sp>
       <p:sp>
         <p:nvSpPr>
@@ -26046,6 +26183,10 @@
             </a:solidFill>
           </a:ln>
         </p:spPr>
+        <p:txBody xmlns:a="http://schemas.openxmlformats.org/drawingml/2006/main">
+          <a:bodyPr/>
+          <a:p/>
+        </p:txBody>
       </p:sp>
       <p:sp>
         <p:nvSpPr>
@@ -26136,6 +26277,10 @@
             </a:solidFill>
           </a:ln>
         </p:spPr>
+        <p:txBody xmlns:a="http://schemas.openxmlformats.org/drawingml/2006/main">
+          <a:bodyPr/>
+          <a:p/>
+        </p:txBody>
       </p:sp>
       <p:sp>
         <p:nvSpPr>
@@ -26216,6 +26361,10 @@
             <a:noFill/>
           </a:ln>
         </p:spPr>
+        <p:txBody xmlns:a="http://schemas.openxmlformats.org/drawingml/2006/main">
+          <a:bodyPr/>
+          <a:p/>
+        </p:txBody>
       </p:sp>
       <p:sp>
         <p:nvSpPr>
@@ -26273,6 +26422,10 @@
             </a:solidFill>
           </a:ln>
         </p:spPr>
+        <p:txBody xmlns:a="http://schemas.openxmlformats.org/drawingml/2006/main">
+          <a:bodyPr/>
+          <a:p/>
+        </p:txBody>
       </p:sp>
       <p:sp>
         <p:nvSpPr>
@@ -26326,6 +26479,10 @@
             </a:solidFill>
           </a:ln>
         </p:spPr>
+        <p:txBody xmlns:a="http://schemas.openxmlformats.org/drawingml/2006/main">
+          <a:bodyPr/>
+          <a:p/>
+        </p:txBody>
       </p:sp>
       <p:sp>
         <p:nvSpPr>
@@ -26379,6 +26536,10 @@
             </a:solidFill>
           </a:ln>
         </p:spPr>
+        <p:txBody xmlns:a="http://schemas.openxmlformats.org/drawingml/2006/main">
+          <a:bodyPr/>
+          <a:p/>
+        </p:txBody>
       </p:sp>
       <p:sp>
         <p:nvSpPr>
@@ -26461,6 +26622,10 @@
             <a:noFill/>
           </a:ln>
         </p:spPr>
+        <p:txBody xmlns:a="http://schemas.openxmlformats.org/drawingml/2006/main">
+          <a:bodyPr/>
+          <a:p/>
+        </p:txBody>
       </p:sp>
       <p:sp>
         <p:nvSpPr>
@@ -26551,6 +26716,10 @@
             </a:solidFill>
           </a:ln>
         </p:spPr>
+        <p:txBody xmlns:a="http://schemas.openxmlformats.org/drawingml/2006/main">
+          <a:bodyPr/>
+          <a:p/>
+        </p:txBody>
       </p:sp>
       <p:sp>
         <p:nvSpPr>
@@ -26641,6 +26810,10 @@
             </a:solidFill>
           </a:ln>
         </p:spPr>
+        <p:txBody xmlns:a="http://schemas.openxmlformats.org/drawingml/2006/main">
+          <a:bodyPr/>
+          <a:p/>
+        </p:txBody>
       </p:sp>
       <p:sp>
         <p:nvSpPr>
@@ -26731,6 +26904,10 @@
             </a:solidFill>
           </a:ln>
         </p:spPr>
+        <p:txBody xmlns:a="http://schemas.openxmlformats.org/drawingml/2006/main">
+          <a:bodyPr/>
+          <a:p/>
+        </p:txBody>
       </p:sp>
       <p:sp>
         <p:nvSpPr>
@@ -26821,6 +26998,10 @@
             </a:solidFill>
           </a:ln>
         </p:spPr>
+        <p:txBody xmlns:a="http://schemas.openxmlformats.org/drawingml/2006/main">
+          <a:bodyPr/>
+          <a:p/>
+        </p:txBody>
       </p:sp>
       <p:sp>
         <p:nvSpPr>
@@ -26911,6 +27092,10 @@
             </a:solidFill>
           </a:ln>
         </p:spPr>
+        <p:txBody xmlns:a="http://schemas.openxmlformats.org/drawingml/2006/main">
+          <a:bodyPr/>
+          <a:p/>
+        </p:txBody>
       </p:sp>
       <p:sp>
         <p:nvSpPr>
@@ -27028,8 +27213,8 @@
         </p:nvSpPr>
         <p:spPr>
           <a:xfrm xmlns:a="http://schemas.openxmlformats.org/drawingml/2006/main" rot="0" flipH="0" flipV="0">
-            <a:off x="7780528" y="5966460"/>
-            <a:ext cx="3807968" cy="234696"/>
+            <a:off x="7342631" y="5966460"/>
+            <a:ext cx="4242816" cy="234696"/>
           </a:xfrm>
           <a:prstGeom xmlns:a="http://schemas.openxmlformats.org/drawingml/2006/main" prst="rect">
             <a:avLst/>
@@ -27057,7 +27242,7 @@
                 <a:ea typeface="Microsoft YaHei"/>
                 <a:cs typeface="Microsoft YaHei"/>
               </a:rPr>
-              <a:t>视觉模型待实测；</a:t>
+              <a:t>StepFun 合成图片已到达 Review；视觉待实测；Mock 不识别图片</a:t>
             </a:r>
             <a:r>
               <a:rPr sz="1200">
@@ -27068,7 +27253,7 @@
                 <a:ea typeface="Arial"/>
                 <a:cs typeface="Arial"/>
               </a:rPr>
-              <a:t>Mock </a:t>
+              <a:t/>
             </a:r>
             <a:r>
               <a:rPr sz="1200">
@@ -27079,7 +27264,7 @@
                 <a:ea typeface="Microsoft YaHei"/>
                 <a:cs typeface="Microsoft YaHei"/>
               </a:rPr>
-              <a:t>不识别图片</a:t>
+              <a:t/>
             </a:r>
           </a:p>
         </p:txBody>
@@ -27246,6 +27431,10 @@
             <a:noFill/>
           </a:ln>
         </p:spPr>
+        <p:txBody xmlns:a="http://schemas.openxmlformats.org/drawingml/2006/main">
+          <a:bodyPr/>
+          <a:p/>
+        </p:txBody>
       </p:sp>
       <p:sp>
         <p:nvSpPr>
@@ -27408,6 +27597,10 @@
             </a:solidFill>
           </a:ln>
         </p:spPr>
+        <p:txBody xmlns:a="http://schemas.openxmlformats.org/drawingml/2006/main">
+          <a:bodyPr/>
+          <a:p/>
+        </p:txBody>
       </p:sp>
       <p:sp>
         <p:nvSpPr>
@@ -27448,6 +27641,10 @@
             </a:solidFill>
           </a:ln>
         </p:spPr>
+        <p:txBody xmlns:a="http://schemas.openxmlformats.org/drawingml/2006/main">
+          <a:bodyPr/>
+          <a:p/>
+        </p:txBody>
       </p:sp>
       <p:sp>
         <p:nvSpPr>
@@ -27494,7 +27691,7 @@
                 <a:ea typeface="Georgia"/>
                 <a:cs typeface="Georgia"/>
               </a:rPr>
-              <a:t>52</a:t>
+              <a:t>74</a:t>
             </a:r>
           </a:p>
         </p:txBody>
@@ -27588,7 +27785,7 @@
         <p:spPr>
           <a:xfrm xmlns:a="http://schemas.openxmlformats.org/drawingml/2006/main" rot="0" flipH="0" flipV="0">
             <a:off x="603504" y="3204210"/>
-            <a:ext cx="2649322" cy="234696"/>
+            <a:ext cx="3291840" cy="234696"/>
           </a:xfrm>
           <a:prstGeom xmlns:a="http://schemas.openxmlformats.org/drawingml/2006/main" prst="rect">
             <a:avLst/>
@@ -27616,7 +27813,7 @@
                 <a:ea typeface="Microsoft YaHei"/>
                 <a:cs typeface="Microsoft YaHei"/>
               </a:rPr>
-              <a:t>图片传参、输出校验与失败处理</a:t>
+              <a:t>StepFun 装配、图片传参、输出校验与失败处理</a:t>
             </a:r>
           </a:p>
         </p:txBody>
@@ -27660,6 +27857,10 @@
             </a:solidFill>
           </a:ln>
         </p:spPr>
+        <p:txBody xmlns:a="http://schemas.openxmlformats.org/drawingml/2006/main">
+          <a:bodyPr/>
+          <a:p/>
+        </p:txBody>
       </p:sp>
       <p:sp>
         <p:nvSpPr>
@@ -27706,7 +27907,7 @@
                 <a:ea typeface="Georgia"/>
                 <a:cs typeface="Georgia"/>
               </a:rPr>
-              <a:t>24</a:t>
+              <a:t>68</a:t>
             </a:r>
           </a:p>
         </p:txBody>
@@ -27800,7 +28001,7 @@
         <p:spPr>
           <a:xfrm xmlns:a="http://schemas.openxmlformats.org/drawingml/2006/main" rot="0" flipH="0" flipV="0">
             <a:off x="4261104" y="3204210"/>
-            <a:ext cx="1789176" cy="234696"/>
+            <a:ext cx="2377440" cy="234696"/>
           </a:xfrm>
           <a:prstGeom xmlns:a="http://schemas.openxmlformats.org/drawingml/2006/main" prst="rect">
             <a:avLst/>
@@ -27828,7 +28029,7 @@
                 <a:ea typeface="Microsoft YaHei"/>
                 <a:cs typeface="Microsoft YaHei"/>
               </a:rPr>
-              <a:t>上传边界、配置与查重</a:t>
+              <a:t>上传边界、Provider 配置与查重</a:t>
             </a:r>
           </a:p>
         </p:txBody>
@@ -27872,6 +28073,10 @@
             </a:solidFill>
           </a:ln>
         </p:spPr>
+        <p:txBody xmlns:a="http://schemas.openxmlformats.org/drawingml/2006/main">
+          <a:bodyPr/>
+          <a:p/>
+        </p:txBody>
       </p:sp>
       <p:sp>
         <p:nvSpPr>
@@ -27890,7 +28095,7 @@
         <p:spPr>
           <a:xfrm xmlns:a="http://schemas.openxmlformats.org/drawingml/2006/main" rot="0" flipH="0" flipV="0">
             <a:off x="7906512" y="2164080"/>
-            <a:ext cx="628010" cy="704088"/>
+            <a:ext cx="923544" cy="704088"/>
           </a:xfrm>
           <a:prstGeom xmlns:a="http://schemas.openxmlformats.org/drawingml/2006/main" prst="rect">
             <a:avLst/>
@@ -27918,7 +28123,7 @@
                 <a:ea typeface="Georgia"/>
                 <a:cs typeface="Georgia"/>
               </a:rPr>
-              <a:t>76</a:t>
+              <a:t>200</a:t>
             </a:r>
           </a:p>
         </p:txBody>
@@ -27990,7 +28195,7 @@
         <p:spPr>
           <a:xfrm xmlns:a="http://schemas.openxmlformats.org/drawingml/2006/main" rot="0" flipH="0" flipV="0">
             <a:off x="7918704" y="3204210"/>
-            <a:ext cx="2307946" cy="234696"/>
+            <a:ext cx="3200400" cy="234696"/>
           </a:xfrm>
           <a:prstGeom xmlns:a="http://schemas.openxmlformats.org/drawingml/2006/main" prst="rect">
             <a:avLst/>
@@ -28018,7 +28223,7 @@
                 <a:ea typeface="Microsoft YaHei"/>
                 <a:cs typeface="Microsoft YaHei"/>
               </a:rPr>
-              <a:t>范围：</a:t>
+              <a:t>全仓四包合计；另不变量 99 项、E2E 29 项</a:t>
             </a:r>
             <a:r>
               <a:rPr sz="1200">
@@ -28029,7 +28234,7 @@
                 <a:ea typeface="Arial"/>
                 <a:cs typeface="Arial"/>
               </a:rPr>
-              <a:t>AI </a:t>
+              <a:t/>
             </a:r>
             <a:r>
               <a:rPr sz="1200">
@@ -28040,7 +28245,7 @@
                 <a:ea typeface="Microsoft YaHei"/>
                 <a:cs typeface="Microsoft YaHei"/>
               </a:rPr>
-              <a:t>与</a:t>
+              <a:t/>
             </a:r>
             <a:r>
               <a:rPr sz="1200">
@@ -28051,7 +28256,7 @@
                 <a:ea typeface="Arial"/>
                 <a:cs typeface="Arial"/>
               </a:rPr>
-              <a:t> Web</a:t>
+              <a:t/>
             </a:r>
             <a:r>
               <a:rPr sz="1200">
@@ -28062,7 +28267,7 @@
                 <a:ea typeface="Microsoft YaHei"/>
                 <a:cs typeface="Microsoft YaHei"/>
               </a:rPr>
-              <a:t>，非全仓总数</a:t>
+              <a:t/>
             </a:r>
           </a:p>
         </p:txBody>
@@ -28106,6 +28311,10 @@
             </a:solidFill>
           </a:ln>
         </p:spPr>
+        <p:txBody xmlns:a="http://schemas.openxmlformats.org/drawingml/2006/main">
+          <a:bodyPr/>
+          <a:p/>
+        </p:txBody>
       </p:sp>
       <p:sp>
         <p:nvSpPr>
@@ -28146,6 +28355,10 @@
             </a:solidFill>
           </a:ln>
         </p:spPr>
+        <p:txBody xmlns:a="http://schemas.openxmlformats.org/drawingml/2006/main">
+          <a:bodyPr/>
+          <a:p/>
+        </p:txBody>
       </p:sp>
       <p:sp>
         <p:nvSpPr>
@@ -28186,6 +28399,10 @@
             </a:solidFill>
           </a:ln>
         </p:spPr>
+        <p:txBody xmlns:a="http://schemas.openxmlformats.org/drawingml/2006/main">
+          <a:bodyPr/>
+          <a:p/>
+        </p:txBody>
       </p:sp>
       <p:sp>
         <p:nvSpPr>
@@ -28326,6 +28543,10 @@
             </a:solidFill>
           </a:ln>
         </p:spPr>
+        <p:txBody xmlns:a="http://schemas.openxmlformats.org/drawingml/2006/main">
+          <a:bodyPr/>
+          <a:p/>
+        </p:txBody>
       </p:sp>
       <p:sp>
         <p:nvSpPr>
@@ -28374,6 +28595,10 @@
             </a:solidFill>
           </a:ln>
         </p:spPr>
+        <p:txBody xmlns:a="http://schemas.openxmlformats.org/drawingml/2006/main">
+          <a:bodyPr/>
+          <a:p/>
+        </p:txBody>
       </p:sp>
       <p:sp>
         <p:nvSpPr>
@@ -28441,6 +28666,10 @@
             </a:solidFill>
           </a:ln>
         </p:spPr>
+        <p:txBody xmlns:a="http://schemas.openxmlformats.org/drawingml/2006/main">
+          <a:bodyPr/>
+          <a:p/>
+        </p:txBody>
       </p:sp>
       <p:sp>
         <p:nvSpPr>
@@ -28481,6 +28710,10 @@
             </a:solidFill>
           </a:ln>
         </p:spPr>
+        <p:txBody xmlns:a="http://schemas.openxmlformats.org/drawingml/2006/main">
+          <a:bodyPr/>
+          <a:p/>
+        </p:txBody>
       </p:sp>
       <p:sp>
         <p:nvSpPr>
@@ -28521,6 +28754,10 @@
             </a:solidFill>
           </a:ln>
         </p:spPr>
+        <p:txBody xmlns:a="http://schemas.openxmlformats.org/drawingml/2006/main">
+          <a:bodyPr/>
+          <a:p/>
+        </p:txBody>
       </p:sp>
       <p:sp>
         <p:nvSpPr>
@@ -28561,6 +28798,10 @@
             </a:solidFill>
           </a:ln>
         </p:spPr>
+        <p:txBody xmlns:a="http://schemas.openxmlformats.org/drawingml/2006/main">
+          <a:bodyPr/>
+          <a:p/>
+        </p:txBody>
       </p:sp>
       <p:sp>
         <p:nvSpPr>
@@ -28701,6 +28942,10 @@
             </a:solidFill>
           </a:ln>
         </p:spPr>
+        <p:txBody xmlns:a="http://schemas.openxmlformats.org/drawingml/2006/main">
+          <a:bodyPr/>
+          <a:p/>
+        </p:txBody>
       </p:sp>
       <p:sp>
         <p:nvSpPr>
@@ -28847,7 +29092,7 @@
                 <a:ea typeface="Arial"/>
                 <a:cs typeface="Arial"/>
               </a:rPr>
-              <a:t>2026-08-31 </a:t>
+              <a:t>2026-09-06 复跑 · 单测响应为模拟；一条 StepFun 合成图片 Intake 已到达 Review</a:t>
             </a:r>
             <a:r>
               <a:rPr sz="1200">
@@ -28858,7 +29103,7 @@
                 <a:ea typeface="Microsoft YaHei"/>
                 <a:cs typeface="Microsoft YaHei"/>
               </a:rPr>
-              <a:t>图片修复后验证</a:t>
+              <a:t/>
             </a:r>
             <a:r>
               <a:rPr sz="1200">
@@ -28869,7 +29114,7 @@
                 <a:ea typeface="Arial"/>
                 <a:cs typeface="Arial"/>
               </a:rPr>
-              <a:t> · </a:t>
+              <a:t/>
             </a:r>
             <a:r>
               <a:rPr sz="1200">
@@ -28880,7 +29125,7 @@
                 <a:ea typeface="Microsoft YaHei"/>
                 <a:cs typeface="Microsoft YaHei"/>
               </a:rPr>
-              <a:t>未重跑完整</a:t>
+              <a:t/>
             </a:r>
             <a:r>
               <a:rPr sz="1200">
@@ -28891,7 +29136,7 @@
                 <a:ea typeface="Arial"/>
                 <a:cs typeface="Arial"/>
               </a:rPr>
-              <a:t> E2E</a:t>
+              <a:t/>
             </a:r>
             <a:r>
               <a:rPr sz="1200">
@@ -28902,7 +29147,7 @@
                 <a:ea typeface="Microsoft YaHei"/>
                 <a:cs typeface="Microsoft YaHei"/>
               </a:rPr>
-              <a:t>，未调用真实视觉模型</a:t>
+              <a:t/>
             </a:r>
           </a:p>
         </p:txBody>
@@ -29346,324 +29591,4 @@
   </a:objectDefaults>
   <a:extraClrSchemeLst/>
 </a:theme>
-</file>
-
-<file path=ppt/theme/theme2.xml><?xml version="1.0" encoding="utf-8"?>
-<a:theme xmlns:a="http://schemas.openxmlformats.org/drawingml/2006/main" name="Office Theme">
-  <a:themeElements>
-    <a:clrScheme name="Office">
-      <a:dk1>
-        <a:sysClr val="windowText" lastClr="000000"/>
-      </a:dk1>
-      <a:lt1>
-        <a:sysClr val="window" lastClr="FFFFFF"/>
-      </a:lt1>
-      <a:dk2>
-        <a:srgbClr val="1F497D"/>
-      </a:dk2>
-      <a:lt2>
-        <a:srgbClr val="EEECE1"/>
-      </a:lt2>
-      <a:accent1>
-        <a:srgbClr val="4F81BD"/>
-      </a:accent1>
-      <a:accent2>
-        <a:srgbClr val="C0504D"/>
-      </a:accent2>
-      <a:accent3>
-        <a:srgbClr val="9BBB59"/>
-      </a:accent3>
-      <a:accent4>
-        <a:srgbClr val="8064A2"/>
-      </a:accent4>
-      <a:accent5>
-        <a:srgbClr val="4BACC6"/>
-      </a:accent5>
-      <a:accent6>
-        <a:srgbClr val="F79646"/>
-      </a:accent6>
-      <a:hlink>
-        <a:srgbClr val="0000FF"/>
-      </a:hlink>
-      <a:folHlink>
-        <a:srgbClr val="800080"/>
-      </a:folHlink>
-    </a:clrScheme>
-    <a:fontScheme name="Office">
-      <a:majorFont>
-        <a:latin typeface="Calibri"/>
-        <a:ea typeface=""/>
-        <a:cs typeface=""/>
-        <a:font script="Jpan" typeface="ＭＳ Ｐゴシック"/>
-        <a:font script="Hang" typeface="맑은 고딕"/>
-        <a:font script="Hans" typeface="宋体"/>
-        <a:font script="Hant" typeface="新細明體"/>
-        <a:font script="Arab" typeface="Times New Roman"/>
-        <a:font script="Hebr" typeface="Times New Roman"/>
-        <a:font script="Thai" typeface="Angsana New"/>
-        <a:font script="Ethi" typeface="Nyala"/>
-        <a:font script="Beng" typeface="Vrinda"/>
-        <a:font script="Gujr" typeface="Shruti"/>
-        <a:font script="Khmr" typeface="MoolBoran"/>
-        <a:font script="Knda" typeface="Tunga"/>
-        <a:font script="Guru" typeface="Raavi"/>
-        <a:font script="Cans" typeface="Euphemia"/>
-        <a:font script="Cher" typeface="Plantagenet Cherokee"/>
-        <a:font script="Yiii" typeface="Microsoft Yi Baiti"/>
-        <a:font script="Tibt" typeface="Microsoft Himalaya"/>
-        <a:font script="Thaa" typeface="MV Boli"/>
-        <a:font script="Deva" typeface="Mangal"/>
-        <a:font script="Telu" typeface="Gautami"/>
-        <a:font script="Taml" typeface="Latha"/>
-        <a:font script="Syrc" typeface="Estrangelo Edessa"/>
-        <a:font script="Orya" typeface="Kalinga"/>
-        <a:font script="Mlym" typeface="Kartika"/>
-        <a:font script="Laoo" typeface="DokChampa"/>
-        <a:font script="Sinh" typeface="Iskoola Pota"/>
-        <a:font script="Mong" typeface="Mongolian Baiti"/>
-        <a:font script="Viet" typeface="Times New Roman"/>
-        <a:font script="Uigh" typeface="Microsoft Uighur"/>
-        <a:font script="Geor" typeface="Sylfaen"/>
-      </a:majorFont>
-      <a:minorFont>
-        <a:latin typeface="Calibri"/>
-        <a:ea typeface=""/>
-        <a:cs typeface=""/>
-        <a:font script="Jpan" typeface="ＭＳ Ｐゴシック"/>
-        <a:font script="Hang" typeface="맑은 고딕"/>
-        <a:font script="Hans" typeface="宋体"/>
-        <a:font script="Hant" typeface="新細明體"/>
-        <a:font script="Arab" typeface="Arial"/>
-        <a:font script="Hebr" typeface="Arial"/>
-        <a:font script="Thai" typeface="Cordia New"/>
-        <a:font script="Ethi" typeface="Nyala"/>
-        <a:font script="Beng" typeface="Vrinda"/>
-        <a:font script="Gujr" typeface="Shruti"/>
-        <a:font script="Khmr" typeface="DaunPenh"/>
-        <a:font script="Knda" typeface="Tunga"/>
-        <a:font script="Guru" typeface="Raavi"/>
-        <a:font script="Cans" typeface="Euphemia"/>
-        <a:font script="Cher" typeface="Plantagenet Cherokee"/>
-        <a:font script="Yiii" typeface="Microsoft Yi Baiti"/>
-        <a:font script="Tibt" typeface="Microsoft Himalaya"/>
-        <a:font script="Thaa" typeface="MV Boli"/>
-        <a:font script="Deva" typeface="Mangal"/>
-        <a:font script="Telu" typeface="Gautami"/>
-        <a:font script="Taml" typeface="Latha"/>
-        <a:font script="Syrc" typeface="Estrangelo Edessa"/>
-        <a:font script="Orya" typeface="Kalinga"/>
-        <a:font script="Mlym" typeface="Kartika"/>
-        <a:font script="Laoo" typeface="DokChampa"/>
-        <a:font script="Sinh" typeface="Iskoola Pota"/>
-        <a:font script="Mong" typeface="Mongolian Baiti"/>
-        <a:font script="Viet" typeface="Arial"/>
-        <a:font script="Uigh" typeface="Microsoft Uighur"/>
-        <a:font script="Geor" typeface="Sylfaen"/>
-      </a:minorFont>
-    </a:fontScheme>
-    <a:fmtScheme name="Office">
-      <a:fillStyleLst>
-        <a:solidFill>
-          <a:schemeClr val="phClr"/>
-        </a:solidFill>
-        <a:gradFill rotWithShape="1">
-          <a:gsLst>
-            <a:gs pos="0">
-              <a:schemeClr val="phClr">
-                <a:tint val="50000"/>
-                <a:satMod val="300000"/>
-              </a:schemeClr>
-            </a:gs>
-            <a:gs pos="35000">
-              <a:schemeClr val="phClr">
-                <a:tint val="37000"/>
-                <a:satMod val="300000"/>
-              </a:schemeClr>
-            </a:gs>
-            <a:gs pos="100000">
-              <a:schemeClr val="phClr">
-                <a:tint val="15000"/>
-                <a:satMod val="350000"/>
-              </a:schemeClr>
-            </a:gs>
-          </a:gsLst>
-          <a:lin ang="16200000" scaled="1"/>
-        </a:gradFill>
-        <a:gradFill rotWithShape="1">
-          <a:gsLst>
-            <a:gs pos="0">
-              <a:schemeClr val="phClr">
-                <a:tint val="100000"/>
-                <a:shade val="100000"/>
-                <a:satMod val="130000"/>
-              </a:schemeClr>
-            </a:gs>
-            <a:gs pos="100000">
-              <a:schemeClr val="phClr">
-                <a:tint val="50000"/>
-                <a:shade val="100000"/>
-                <a:satMod val="350000"/>
-              </a:schemeClr>
-            </a:gs>
-          </a:gsLst>
-          <a:lin ang="16200000" scaled="0"/>
-        </a:gradFill>
-      </a:fillStyleLst>
-      <a:lnStyleLst>
-        <a:ln w="9525" cap="flat" cmpd="sng" algn="ctr">
-          <a:solidFill>
-            <a:schemeClr val="phClr">
-              <a:shade val="95000"/>
-              <a:satMod val="105000"/>
-            </a:schemeClr>
-          </a:solidFill>
-          <a:prstDash val="solid"/>
-        </a:ln>
-        <a:ln w="25400" cap="flat" cmpd="sng" algn="ctr">
-          <a:solidFill>
-            <a:schemeClr val="phClr"/>
-          </a:solidFill>
-          <a:prstDash val="solid"/>
-        </a:ln>
-        <a:ln w="38100" cap="flat" cmpd="sng" algn="ctr">
-          <a:solidFill>
-            <a:schemeClr val="phClr"/>
-          </a:solidFill>
-          <a:prstDash val="solid"/>
-        </a:ln>
-      </a:lnStyleLst>
-      <a:effectStyleLst>
-        <a:effectStyle>
-          <a:effectLst>
-            <a:outerShdw blurRad="40000" dist="20000" dir="5400000" rotWithShape="0">
-              <a:srgbClr val="000000">
-                <a:alpha val="38000"/>
-              </a:srgbClr>
-            </a:outerShdw>
-          </a:effectLst>
-        </a:effectStyle>
-        <a:effectStyle>
-          <a:effectLst>
-            <a:outerShdw blurRad="40000" dist="23000" dir="5400000" rotWithShape="0">
-              <a:srgbClr val="000000">
-                <a:alpha val="35000"/>
-              </a:srgbClr>
-            </a:outerShdw>
-          </a:effectLst>
-        </a:effectStyle>
-        <a:effectStyle>
-          <a:effectLst>
-            <a:outerShdw blurRad="40000" dist="23000" dir="5400000" rotWithShape="0">
-              <a:srgbClr val="000000">
-                <a:alpha val="35000"/>
-              </a:srgbClr>
-            </a:outerShdw>
-          </a:effectLst>
-          <a:scene3d>
-            <a:camera prst="orthographicFront">
-              <a:rot lat="0" lon="0" rev="0"/>
-            </a:camera>
-            <a:lightRig rig="threePt" dir="t">
-              <a:rot lat="0" lon="0" rev="1200000"/>
-            </a:lightRig>
-          </a:scene3d>
-          <a:sp3d>
-            <a:bevelT w="63500" h="25400"/>
-          </a:sp3d>
-        </a:effectStyle>
-      </a:effectStyleLst>
-      <a:bgFillStyleLst>
-        <a:solidFill>
-          <a:schemeClr val="phClr"/>
-        </a:solidFill>
-        <a:gradFill rotWithShape="1">
-          <a:gsLst>
-            <a:gs pos="0">
-              <a:schemeClr val="phClr">
-                <a:tint val="40000"/>
-                <a:satMod val="350000"/>
-              </a:schemeClr>
-            </a:gs>
-            <a:gs pos="40000">
-              <a:schemeClr val="phClr">
-                <a:tint val="45000"/>
-                <a:shade val="99000"/>
-                <a:satMod val="350000"/>
-              </a:schemeClr>
-            </a:gs>
-            <a:gs pos="100000">
-              <a:schemeClr val="phClr">
-                <a:shade val="20000"/>
-                <a:satMod val="255000"/>
-              </a:schemeClr>
-            </a:gs>
-          </a:gsLst>
-          <a:path path="circle">
-            <a:fillToRect l="50000" t="-80000" r="50000" b="180000"/>
-          </a:path>
-        </a:gradFill>
-        <a:gradFill rotWithShape="1">
-          <a:gsLst>
-            <a:gs pos="0">
-              <a:schemeClr val="phClr">
-                <a:tint val="80000"/>
-                <a:satMod val="300000"/>
-              </a:schemeClr>
-            </a:gs>
-            <a:gs pos="100000">
-              <a:schemeClr val="phClr">
-                <a:shade val="30000"/>
-                <a:satMod val="200000"/>
-              </a:schemeClr>
-            </a:gs>
-          </a:gsLst>
-          <a:path path="circle">
-            <a:fillToRect l="50000" t="50000" r="50000" b="50000"/>
-          </a:path>
-        </a:gradFill>
-      </a:bgFillStyleLst>
-    </a:fmtScheme>
-  </a:themeElements>
-  <a:objectDefaults>
-    <a:spDef>
-      <a:spPr/>
-      <a:bodyPr/>
-      <a:lstStyle/>
-      <a:style>
-        <a:lnRef idx="1">
-          <a:schemeClr val="accent1"/>
-        </a:lnRef>
-        <a:fillRef idx="3">
-          <a:schemeClr val="accent1"/>
-        </a:fillRef>
-        <a:effectRef idx="2">
-          <a:schemeClr val="accent1"/>
-        </a:effectRef>
-        <a:fontRef idx="minor">
-          <a:schemeClr val="lt1"/>
-        </a:fontRef>
-      </a:style>
-    </a:spDef>
-    <a:lnDef>
-      <a:spPr/>
-      <a:bodyPr/>
-      <a:lstStyle/>
-      <a:style>
-        <a:lnRef idx="2">
-          <a:schemeClr val="accent1"/>
-        </a:lnRef>
-        <a:fillRef idx="0">
-          <a:schemeClr val="accent1"/>
-        </a:fillRef>
-        <a:effectRef idx="1">
-          <a:schemeClr val="accent1"/>
-        </a:effectRef>
-        <a:fontRef idx="minor">
-          <a:schemeClr val="tx1"/>
-        </a:fontRef>
-      </a:style>
-    </a:lnDef>
-  </a:objectDefaults>
-  <a:extraClrSchemeLst/>
-</a:theme>
 </file>